--- a/exports/pitchbooks/NVDA_Institutional_Pitchbook.pptx
+++ b/exports/pitchbooks/NVDA_Institutional_Pitchbook.pptx
@@ -3134,7 +3134,7 @@
               </a:defRPr>
             </a:pPr>
             <a:r>
-              <a:t>NVIDIA Corporation (NVDA)</a:t>
+              <a:t>NVDA (NVDA)</a:t>
             </a:r>
           </a:p>
           <a:p>
@@ -3146,7 +3146,7 @@
               </a:defRPr>
             </a:pPr>
             <a:r>
-              <a:t>Automated Swarm Analysis &amp; Financial Valuation Deck | August 18, 2026</a:t>
+              <a:t>Automated Swarm Analysis &amp; Financial Valuation Deck | August 19, 2026</a:t>
             </a:r>
           </a:p>
         </p:txBody>
@@ -3246,7 +3246,7 @@
               </a:defRPr>
             </a:pPr>
             <a:r>
-              <a:t>Autonomous Financial Intelligence &amp; Due Diligence Report for NVIDIA Corporation (NVDA).</a:t>
+              <a:t>Autonomous Financial Intelligence &amp; Due Diligence Report for NVDA (NVDA).</a:t>
             </a:r>
             <a:br/>
             <a:r>
